--- a/smarter-monitoring/slides/staging.pptx
+++ b/smarter-monitoring/slides/staging.pptx
@@ -25,9 +25,10 @@
     <p:sldId id="273" r:id="rId19"/>
     <p:sldId id="274" r:id="rId20"/>
     <p:sldId id="275" r:id="rId21"/>
+    <p:sldId id="276" r:id="rId22"/>
   </p:sldIdLst>
   <p:notesMasterIdLst>
-    <p:notesMasterId r:id="rId22"/>
+    <p:notesMasterId r:id="rId23"/>
   </p:notesMasterIdLst>
   <p:sldSz cx="12192000" cy="6858000"/>
   <p:notesSz cx="6858000" cy="12192000"/>
@@ -1601,6 +1602,94 @@
             <a:fld id="{F7021451-1387-4CA6-816F-3879F97B5CBC}" type="slidenum">
               <a:rPr lang="en-US"/>
               <a:t>20</a:t>
+            </a:fld>
+            <a:endParaRPr lang="en-US"/>
+          </a:p>
+        </p:txBody>
+      </p:sp>
+    </p:spTree>
+    <p:extLst>
+      <p:ext uri="{BB962C8B-B14F-4D97-AF65-F5344CB8AC3E}">
+        <p14:creationId xmlns:p14="http://schemas.microsoft.com/office/powerpoint/2010/main" val="1024086991"/>
+      </p:ext>
+    </p:extLst>
+  </p:cSld>
+  <p:clrMapOvr>
+    <a:masterClrMapping/>
+  </p:clrMapOvr>
+</p:notes>
+</file>
+
+<file path=ppt/notesSlides/notesSlide21.xml><?xml version="1.0" encoding="utf-8"?>
+<p:notes xmlns:a="http://schemas.openxmlformats.org/drawingml/2006/main" xmlns:r="http://schemas.openxmlformats.org/officeDocument/2006/relationships" xmlns:p="http://schemas.openxmlformats.org/presentationml/2006/main">
+  <p:cSld>
+    <p:spTree>
+      <p:nvGrpSpPr>
+        <p:cNvPr id="1" name=""/>
+        <p:cNvGrpSpPr/>
+        <p:nvPr/>
+      </p:nvGrpSpPr>
+      <p:grpSpPr>
+        <a:xfrm>
+          <a:off x="0" y="0"/>
+          <a:ext cx="0" cy="0"/>
+          <a:chOff x="0" y="0"/>
+          <a:chExt cx="0" cy="0"/>
+        </a:xfrm>
+      </p:grpSpPr>
+      <p:sp>
+        <p:nvSpPr>
+          <p:cNvPr id="2" name="Slide Image Placeholder 1"/>
+          <p:cNvSpPr>
+            <a:spLocks noGrp="1" noRot="1" noChangeAspect="1"/>
+          </p:cNvSpPr>
+          <p:nvPr>
+            <p:ph type="sldImg"/>
+          </p:nvPr>
+        </p:nvSpPr>
+        <p:spPr/>
+      </p:sp>
+      <p:sp>
+        <p:nvSpPr>
+          <p:cNvPr id="3" name="Notes Placeholder 2"/>
+          <p:cNvSpPr>
+            <a:spLocks noGrp="1"/>
+          </p:cNvSpPr>
+          <p:nvPr>
+            <p:ph type="body" idx="1"/>
+          </p:nvPr>
+        </p:nvSpPr>
+        <p:spPr/>
+        <p:txBody>
+          <a:bodyPr/>
+          <a:lstStyle/>
+          <a:p>
+            <a:r>
+              <a:rPr lang="en-US" dirty="0"/>
+              <a:t>Thank-you slide. Leave it up through the last questions so people can grab the links. The repo line is the one to point at: Deploy-Azure.ps1 builds the whole thing in their own subscription.</a:t>
+            </a:r>
+            <a:endParaRPr lang="en-US" dirty="0"/>
+          </a:p>
+        </p:txBody>
+      </p:sp>
+      <p:sp>
+        <p:nvSpPr>
+          <p:cNvPr id="4" name="Slide Number Placeholder 3"/>
+          <p:cNvSpPr>
+            <a:spLocks noGrp="1"/>
+          </p:cNvSpPr>
+          <p:nvPr>
+            <p:ph type="sldNum" sz="quarter" idx="10"/>
+          </p:nvPr>
+        </p:nvSpPr>
+        <p:spPr/>
+        <p:txBody>
+          <a:bodyPr/>
+          <a:lstStyle/>
+          <a:p>
+            <a:fld id="{F7021451-1387-4CA6-816F-3879F97B5CBC}" type="slidenum">
+              <a:rPr lang="en-US"/>
+              <a:t>21</a:t>
             </a:fld>
             <a:endParaRPr lang="en-US"/>
           </a:p>
@@ -16358,6 +16447,570 @@
 </p:sld>
 </file>
 
+<file path=ppt/slides/slide21.xml><?xml version="1.0" encoding="utf-8"?>
+<p:sld xmlns:a="http://schemas.openxmlformats.org/drawingml/2006/main" xmlns:r="http://schemas.openxmlformats.org/officeDocument/2006/relationships" xmlns:p="http://schemas.openxmlformats.org/presentationml/2006/main">
+  <p:cSld name="Slide 21">
+    <p:bg>
+      <p:bgPr>
+        <a:solidFill>
+          <a:srgbClr val="0E1621"/>
+        </a:solidFill>
+      </p:bgPr>
+    </p:bg>
+    <p:spTree>
+      <p:nvGrpSpPr>
+        <p:cNvPr id="1" name=""/>
+        <p:cNvGrpSpPr/>
+        <p:nvPr/>
+      </p:nvGrpSpPr>
+      <p:grpSpPr>
+        <a:xfrm>
+          <a:off x="0" y="0"/>
+          <a:ext cx="0" cy="0"/>
+          <a:chOff x="0" y="0"/>
+          <a:chExt cx="0" cy="0"/>
+        </a:xfrm>
+      </p:grpSpPr>
+      <p:sp>
+        <p:nvSpPr>
+          <p:cNvPr id="3" name="Text 0"/>
+          <p:cNvSpPr txBox="1"/>
+          <p:nvPr/>
+        </p:nvSpPr>
+        <p:spPr>
+          <a:xfrm>
+            <a:off x="594360" y="1234440"/>
+            <a:ext cx="10058400" cy="365760"/>
+          </a:xfrm>
+          <a:prstGeom prst="rect">
+            <a:avLst/>
+          </a:prstGeom>
+          <a:noFill/>
+          <a:ln/>
+        </p:spPr>
+        <p:txBody>
+          <a:bodyPr wrap="square" lIns="0" tIns="0" rIns="0" bIns="0" rtlCol="0" anchor="ctr"/>
+          <a:lstStyle/>
+          <a:p>
+            <a:pPr indent="0" marL="0">
+              <a:buNone/>
+            </a:pPr>
+            <a:r>
+              <a:rPr lang="en-US" sz="1500" b="1" spc="400" kern="0" dirty="0">
+                <a:solidFill>
+                  <a:srgbClr val="E8A33D"/>
+                </a:solidFill>
+                <a:latin typeface="Calibri" pitchFamily="34" charset="0"/>
+                <a:ea typeface="Calibri" pitchFamily="34" charset="-122"/>
+                <a:cs typeface="Calibri" pitchFamily="34" charset="-120"/>
+              </a:rPr>
+              <a:t>SMARTER MONITORING</a:t>
+            </a:r>
+            <a:endParaRPr lang="en-US" sz="1500" dirty="0"/>
+          </a:p>
+        </p:txBody>
+      </p:sp>
+      <p:sp>
+        <p:nvSpPr>
+          <p:cNvPr id="4" name="Text 1"/>
+          <p:cNvSpPr txBox="1"/>
+          <p:nvPr/>
+        </p:nvSpPr>
+        <p:spPr>
+          <a:xfrm>
+            <a:off x="594360" y="1645920"/>
+            <a:ext cx="10515600" cy="1005840"/>
+          </a:xfrm>
+          <a:prstGeom prst="rect">
+            <a:avLst/>
+          </a:prstGeom>
+          <a:noFill/>
+          <a:ln/>
+        </p:spPr>
+        <p:txBody>
+          <a:bodyPr wrap="square" lIns="0" tIns="0" rIns="0" bIns="0" rtlCol="0" anchor="ctr"/>
+          <a:lstStyle/>
+          <a:p>
+            <a:pPr indent="0" marL="0">
+              <a:buNone/>
+            </a:pPr>
+            <a:r>
+              <a:rPr lang="en-US" sz="6000" b="1" dirty="0">
+                <a:solidFill>
+                  <a:srgbClr val="FFFFFF"/>
+                </a:solidFill>
+                <a:latin typeface="Calibri" pitchFamily="34" charset="0"/>
+                <a:ea typeface="Calibri" pitchFamily="34" charset="-122"/>
+                <a:cs typeface="Calibri" pitchFamily="34" charset="-120"/>
+              </a:rPr>
+              <a:t>Thank you</a:t>
+            </a:r>
+            <a:endParaRPr lang="en-US" sz="6000" dirty="0"/>
+          </a:p>
+        </p:txBody>
+      </p:sp>
+      <p:sp>
+        <p:nvSpPr>
+          <p:cNvPr id="5" name="Text 2"/>
+          <p:cNvSpPr txBox="1"/>
+          <p:nvPr/>
+        </p:nvSpPr>
+        <p:spPr>
+          <a:xfrm>
+            <a:off x="594360" y="2743200"/>
+            <a:ext cx="9144000" cy="365760"/>
+          </a:xfrm>
+          <a:prstGeom prst="rect">
+            <a:avLst/>
+          </a:prstGeom>
+          <a:noFill/>
+          <a:ln/>
+        </p:spPr>
+        <p:txBody>
+          <a:bodyPr wrap="square" lIns="0" tIns="0" rIns="0" bIns="0" rtlCol="0" anchor="ctr"/>
+          <a:lstStyle/>
+          <a:p>
+            <a:pPr indent="0" marL="0">
+              <a:buNone/>
+            </a:pPr>
+            <a:r>
+              <a:rPr lang="en-US" sz="1700" dirty="0">
+                <a:solidFill>
+                  <a:srgbClr val="8FA3B8"/>
+                </a:solidFill>
+                <a:latin typeface="Calibri" pitchFamily="34" charset="0"/>
+                <a:ea typeface="Calibri" pitchFamily="34" charset="-122"/>
+                <a:cs typeface="Calibri" pitchFamily="34" charset="-120"/>
+              </a:rPr>
+              <a:t>Donnie Taylor   ·   The Cloud &amp; AI Summit 2026</a:t>
+            </a:r>
+            <a:endParaRPr lang="en-US" sz="1700" dirty="0"/>
+          </a:p>
+        </p:txBody>
+      </p:sp>
+      <p:sp>
+        <p:nvSpPr>
+          <p:cNvPr id="6" name="Shape 3"/>
+          <p:cNvSpPr/>
+          <p:nvPr/>
+        </p:nvSpPr>
+        <p:spPr>
+          <a:xfrm>
+            <a:off x="594360" y="3383280"/>
+            <a:ext cx="11002975" cy="2414016"/>
+          </a:xfrm>
+          <a:prstGeom prst="roundRect">
+            <a:avLst>
+              <a:gd name="adj" fmla="val 2273"/>
+            </a:avLst>
+          </a:prstGeom>
+          <a:solidFill>
+            <a:srgbClr val="19242F"/>
+          </a:solidFill>
+          <a:ln/>
+        </p:spPr>
+      </p:sp>
+      <p:sp>
+        <p:nvSpPr>
+          <p:cNvPr id="7" name="Shape 4"/>
+          <p:cNvSpPr/>
+          <p:nvPr/>
+        </p:nvSpPr>
+        <p:spPr>
+          <a:xfrm>
+            <a:off x="914400" y="3721608"/>
+            <a:ext cx="219456" cy="219456"/>
+          </a:xfrm>
+          <a:prstGeom prst="ellipse">
+            <a:avLst/>
+          </a:prstGeom>
+          <a:solidFill>
+            <a:srgbClr val="46B98A"/>
+          </a:solidFill>
+          <a:ln/>
+        </p:spPr>
+      </p:sp>
+      <p:sp>
+        <p:nvSpPr>
+          <p:cNvPr id="8" name="Text 5"/>
+          <p:cNvSpPr txBox="1"/>
+          <p:nvPr/>
+        </p:nvSpPr>
+        <p:spPr>
+          <a:xfrm>
+            <a:off x="1371600" y="3611880"/>
+            <a:ext cx="4480560" cy="438912"/>
+          </a:xfrm>
+          <a:prstGeom prst="rect">
+            <a:avLst/>
+          </a:prstGeom>
+          <a:noFill/>
+          <a:ln/>
+        </p:spPr>
+        <p:txBody>
+          <a:bodyPr wrap="square" lIns="0" tIns="0" rIns="0" bIns="0" rtlCol="0" anchor="ctr"/>
+          <a:lstStyle/>
+          <a:p>
+            <a:pPr indent="0" marL="0">
+              <a:buNone/>
+            </a:pPr>
+            <a:r>
+              <a:rPr lang="en-US" sz="2000" b="1" dirty="0">
+                <a:solidFill>
+                  <a:srgbClr val="E9EFF6"/>
+                </a:solidFill>
+                <a:latin typeface="Calibri" pitchFamily="34" charset="0"/>
+                <a:ea typeface="Calibri" pitchFamily="34" charset="-122"/>
+                <a:cs typeface="Calibri" pitchFamily="34" charset="-120"/>
+              </a:rPr>
+              <a:t>github.com/donnietaylor</a:t>
+            </a:r>
+            <a:endParaRPr lang="en-US" sz="2000" dirty="0"/>
+          </a:p>
+        </p:txBody>
+      </p:sp>
+      <p:sp>
+        <p:nvSpPr>
+          <p:cNvPr id="9" name="Text 6"/>
+          <p:cNvSpPr txBox="1"/>
+          <p:nvPr/>
+        </p:nvSpPr>
+        <p:spPr>
+          <a:xfrm>
+            <a:off x="5943600" y="3611880"/>
+            <a:ext cx="5394960" cy="438912"/>
+          </a:xfrm>
+          <a:prstGeom prst="rect">
+            <a:avLst/>
+          </a:prstGeom>
+          <a:noFill/>
+          <a:ln/>
+        </p:spPr>
+        <p:txBody>
+          <a:bodyPr wrap="square" lIns="0" tIns="0" rIns="0" bIns="0" rtlCol="0" anchor="ctr"/>
+          <a:lstStyle/>
+          <a:p>
+            <a:pPr indent="0" marL="0">
+              <a:buNone/>
+            </a:pPr>
+            <a:r>
+              <a:rPr lang="en-US" sz="1400" dirty="0">
+                <a:solidFill>
+                  <a:srgbClr val="8FA3B8"/>
+                </a:solidFill>
+                <a:latin typeface="Calibri" pitchFamily="34" charset="0"/>
+                <a:ea typeface="Calibri" pitchFamily="34" charset="-122"/>
+                <a:cs typeface="Calibri" pitchFamily="34" charset="-120"/>
+              </a:rPr>
+              <a:t>The code from today - Deploy-Azure.ps1 builds it in your tenant</a:t>
+            </a:r>
+            <a:endParaRPr lang="en-US" sz="1400" dirty="0"/>
+          </a:p>
+        </p:txBody>
+      </p:sp>
+      <p:sp>
+        <p:nvSpPr>
+          <p:cNvPr id="10" name="Shape 7"/>
+          <p:cNvSpPr/>
+          <p:nvPr/>
+        </p:nvSpPr>
+        <p:spPr>
+          <a:xfrm>
+            <a:off x="914400" y="4434840"/>
+            <a:ext cx="219456" cy="219456"/>
+          </a:xfrm>
+          <a:prstGeom prst="ellipse">
+            <a:avLst/>
+          </a:prstGeom>
+          <a:solidFill>
+            <a:srgbClr val="5B9BD5"/>
+          </a:solidFill>
+          <a:ln/>
+        </p:spPr>
+      </p:sp>
+      <p:sp>
+        <p:nvSpPr>
+          <p:cNvPr id="11" name="Text 8"/>
+          <p:cNvSpPr txBox="1"/>
+          <p:nvPr/>
+        </p:nvSpPr>
+        <p:spPr>
+          <a:xfrm>
+            <a:off x="1371600" y="4325112"/>
+            <a:ext cx="4480560" cy="438912"/>
+          </a:xfrm>
+          <a:prstGeom prst="rect">
+            <a:avLst/>
+          </a:prstGeom>
+          <a:noFill/>
+          <a:ln/>
+        </p:spPr>
+        <p:txBody>
+          <a:bodyPr wrap="square" lIns="0" tIns="0" rIns="0" bIns="0" rtlCol="0" anchor="ctr"/>
+          <a:lstStyle/>
+          <a:p>
+            <a:pPr indent="0" marL="0">
+              <a:buNone/>
+            </a:pPr>
+            <a:r>
+              <a:rPr lang="en-US" sz="2000" b="1" dirty="0">
+                <a:solidFill>
+                  <a:srgbClr val="E9EFF6"/>
+                </a:solidFill>
+                <a:latin typeface="Calibri" pitchFamily="34" charset="0"/>
+                <a:ea typeface="Calibri" pitchFamily="34" charset="-122"/>
+                <a:cs typeface="Calibri" pitchFamily="34" charset="-120"/>
+              </a:rPr>
+              <a:t>draith.com</a:t>
+            </a:r>
+            <a:endParaRPr lang="en-US" sz="2000" dirty="0"/>
+          </a:p>
+        </p:txBody>
+      </p:sp>
+      <p:sp>
+        <p:nvSpPr>
+          <p:cNvPr id="12" name="Text 9"/>
+          <p:cNvSpPr txBox="1"/>
+          <p:nvPr/>
+        </p:nvSpPr>
+        <p:spPr>
+          <a:xfrm>
+            <a:off x="5943600" y="4325112"/>
+            <a:ext cx="5394960" cy="438912"/>
+          </a:xfrm>
+          <a:prstGeom prst="rect">
+            <a:avLst/>
+          </a:prstGeom>
+          <a:noFill/>
+          <a:ln/>
+        </p:spPr>
+        <p:txBody>
+          <a:bodyPr wrap="square" lIns="0" tIns="0" rIns="0" bIns="0" rtlCol="0" anchor="ctr"/>
+          <a:lstStyle/>
+          <a:p>
+            <a:pPr indent="0" marL="0">
+              <a:buNone/>
+            </a:pPr>
+            <a:r>
+              <a:rPr lang="en-US" sz="1400" dirty="0">
+                <a:solidFill>
+                  <a:srgbClr val="8FA3B8"/>
+                </a:solidFill>
+                <a:latin typeface="Calibri" pitchFamily="34" charset="0"/>
+                <a:ea typeface="Calibri" pitchFamily="34" charset="-122"/>
+                <a:cs typeface="Calibri" pitchFamily="34" charset="-120"/>
+              </a:rPr>
+              <a:t>Blog and write-ups</a:t>
+            </a:r>
+            <a:endParaRPr lang="en-US" sz="1400" dirty="0"/>
+          </a:p>
+        </p:txBody>
+      </p:sp>
+      <p:sp>
+        <p:nvSpPr>
+          <p:cNvPr id="13" name="Shape 10"/>
+          <p:cNvSpPr/>
+          <p:nvPr/>
+        </p:nvSpPr>
+        <p:spPr>
+          <a:xfrm>
+            <a:off x="914400" y="5148072"/>
+            <a:ext cx="219456" cy="219456"/>
+          </a:xfrm>
+          <a:prstGeom prst="ellipse">
+            <a:avLst/>
+          </a:prstGeom>
+          <a:solidFill>
+            <a:srgbClr val="E8A33D"/>
+          </a:solidFill>
+          <a:ln/>
+        </p:spPr>
+      </p:sp>
+      <p:sp>
+        <p:nvSpPr>
+          <p:cNvPr id="14" name="Text 11"/>
+          <p:cNvSpPr txBox="1"/>
+          <p:nvPr/>
+        </p:nvSpPr>
+        <p:spPr>
+          <a:xfrm>
+            <a:off x="1371600" y="5038344"/>
+            <a:ext cx="4480560" cy="438912"/>
+          </a:xfrm>
+          <a:prstGeom prst="rect">
+            <a:avLst/>
+          </a:prstGeom>
+          <a:noFill/>
+          <a:ln/>
+        </p:spPr>
+        <p:txBody>
+          <a:bodyPr wrap="square" lIns="0" tIns="0" rIns="0" bIns="0" rtlCol="0" anchor="ctr"/>
+          <a:lstStyle/>
+          <a:p>
+            <a:pPr indent="0" marL="0">
+              <a:buNone/>
+            </a:pPr>
+            <a:r>
+              <a:rPr lang="en-US" sz="2000" b="1" dirty="0">
+                <a:solidFill>
+                  <a:srgbClr val="E9EFF6"/>
+                </a:solidFill>
+                <a:latin typeface="Calibri" pitchFamily="34" charset="0"/>
+                <a:ea typeface="Calibri" pitchFamily="34" charset="-122"/>
+                <a:cs typeface="Calibri" pitchFamily="34" charset="-120"/>
+              </a:rPr>
+              <a:t>donnietaylor.bsky.social</a:t>
+            </a:r>
+            <a:endParaRPr lang="en-US" sz="2000" dirty="0"/>
+          </a:p>
+        </p:txBody>
+      </p:sp>
+      <p:sp>
+        <p:nvSpPr>
+          <p:cNvPr id="15" name="Text 12"/>
+          <p:cNvSpPr txBox="1"/>
+          <p:nvPr/>
+        </p:nvSpPr>
+        <p:spPr>
+          <a:xfrm>
+            <a:off x="5943600" y="5038344"/>
+            <a:ext cx="5394960" cy="438912"/>
+          </a:xfrm>
+          <a:prstGeom prst="rect">
+            <a:avLst/>
+          </a:prstGeom>
+          <a:noFill/>
+          <a:ln/>
+        </p:spPr>
+        <p:txBody>
+          <a:bodyPr wrap="square" lIns="0" tIns="0" rIns="0" bIns="0" rtlCol="0" anchor="ctr"/>
+          <a:lstStyle/>
+          <a:p>
+            <a:pPr indent="0" marL="0">
+              <a:buNone/>
+            </a:pPr>
+            <a:r>
+              <a:rPr lang="en-US" sz="1400" dirty="0">
+                <a:solidFill>
+                  <a:srgbClr val="8FA3B8"/>
+                </a:solidFill>
+                <a:latin typeface="Calibri" pitchFamily="34" charset="0"/>
+                <a:ea typeface="Calibri" pitchFamily="34" charset="-122"/>
+                <a:cs typeface="Calibri" pitchFamily="34" charset="-120"/>
+              </a:rPr>
+              <a:t>Also on LinkedIn: linkedin.com/in/donnietaylor</a:t>
+            </a:r>
+            <a:endParaRPr lang="en-US" sz="1400" dirty="0"/>
+          </a:p>
+        </p:txBody>
+      </p:sp>
+      <p:sp>
+        <p:nvSpPr>
+          <p:cNvPr id="16" name="Text 13"/>
+          <p:cNvSpPr txBox="1"/>
+          <p:nvPr/>
+        </p:nvSpPr>
+        <p:spPr>
+          <a:xfrm>
+            <a:off x="594360" y="5852160"/>
+            <a:ext cx="8229600" cy="365760"/>
+          </a:xfrm>
+          <a:prstGeom prst="rect">
+            <a:avLst/>
+          </a:prstGeom>
+          <a:noFill/>
+          <a:ln/>
+        </p:spPr>
+        <p:txBody>
+          <a:bodyPr wrap="square" lIns="0" tIns="0" rIns="0" bIns="0" rtlCol="0" anchor="ctr"/>
+          <a:lstStyle/>
+          <a:p>
+            <a:pPr indent="0" marL="0">
+              <a:buNone/>
+            </a:pPr>
+            <a:r>
+              <a:rPr lang="en-US" sz="1600" i="1" dirty="0">
+                <a:solidFill>
+                  <a:srgbClr val="7C90A6"/>
+                </a:solidFill>
+                <a:latin typeface="Calibri" pitchFamily="34" charset="0"/>
+                <a:ea typeface="Calibri" pitchFamily="34" charset="-122"/>
+                <a:cs typeface="Calibri" pitchFamily="34" charset="-120"/>
+              </a:rPr>
+              <a:t>Questions - now, or find me afterwards.</a:t>
+            </a:r>
+            <a:endParaRPr lang="en-US" sz="1600" dirty="0"/>
+          </a:p>
+        </p:txBody>
+      </p:sp>
+      <p:sp>
+        <p:nvSpPr>
+          <p:cNvPr id="17" name="Shape 14"/>
+          <p:cNvSpPr/>
+          <p:nvPr/>
+        </p:nvSpPr>
+        <p:spPr>
+          <a:xfrm>
+            <a:off x="10643616" y="5934456"/>
+            <a:ext cx="201168" cy="201168"/>
+          </a:xfrm>
+          <a:prstGeom prst="ellipse">
+            <a:avLst/>
+          </a:prstGeom>
+          <a:solidFill>
+            <a:srgbClr val="E0443E"/>
+          </a:solidFill>
+          <a:ln/>
+        </p:spPr>
+      </p:sp>
+      <p:sp>
+        <p:nvSpPr>
+          <p:cNvPr id="18" name="Shape 15"/>
+          <p:cNvSpPr/>
+          <p:nvPr/>
+        </p:nvSpPr>
+        <p:spPr>
+          <a:xfrm>
+            <a:off x="11027664" y="5934456"/>
+            <a:ext cx="201168" cy="201168"/>
+          </a:xfrm>
+          <a:prstGeom prst="ellipse">
+            <a:avLst/>
+          </a:prstGeom>
+          <a:solidFill>
+            <a:srgbClr val="E8A33D"/>
+          </a:solidFill>
+          <a:ln/>
+        </p:spPr>
+      </p:sp>
+      <p:sp>
+        <p:nvSpPr>
+          <p:cNvPr id="19" name="Shape 16"/>
+          <p:cNvSpPr/>
+          <p:nvPr/>
+        </p:nvSpPr>
+        <p:spPr>
+          <a:xfrm>
+            <a:off x="11411712" y="5934456"/>
+            <a:ext cx="201168" cy="201168"/>
+          </a:xfrm>
+          <a:prstGeom prst="ellipse">
+            <a:avLst/>
+          </a:prstGeom>
+          <a:solidFill>
+            <a:srgbClr val="46B98A"/>
+          </a:solidFill>
+          <a:ln/>
+        </p:spPr>
+      </p:sp>
+    </p:spTree>
+  </p:cSld>
+  <p:clrMapOvr>
+    <a:masterClrMapping/>
+  </p:clrMapOvr>
+</p:sld>
+</file>
+
 <file path=ppt/slides/slide3.xml><?xml version="1.0" encoding="utf-8"?>
 <p:sld xmlns:a="http://schemas.openxmlformats.org/drawingml/2006/main" xmlns:r="http://schemas.openxmlformats.org/officeDocument/2006/relationships" xmlns:p="http://schemas.openxmlformats.org/presentationml/2006/main">
   <p:cSld name="Slide 3">
